--- a/Introduccion a la Ingenieria/Clases/Clase 11 - Taller de prototipado inicial con IA/Presentacion.pptx
+++ b/Introduccion a la Ingenieria/Clases/Clase 11 - Taller de prototipado inicial con IA/Presentacion.pptx
@@ -4738,7 +4738,7 @@
               </a:spcAft>
             </a:pPr>
             <a:r>
-              <a:rPr sz="1600" b="0" i="0">
+              <a:rPr sz="2000" b="0" i="0">
                 <a:solidFill>
                   <a:srgbClr val="333333"/>
                 </a:solidFill>
@@ -4747,7 +4747,7 @@
               <a:t>–   </a:t>
             </a:r>
             <a:r>
-              <a:rPr sz="1600" b="1" i="0">
+              <a:rPr sz="2000" b="1" i="0">
                 <a:solidFill>
                   <a:srgbClr val="333333"/>
                 </a:solidFill>
@@ -4756,7 +4756,7 @@
               <a:t>Trabajo dirigido:</a:t>
             </a:r>
             <a:r>
-              <a:rPr sz="1600" b="0" i="0">
+              <a:rPr sz="2000" b="0" i="0">
                 <a:solidFill>
                   <a:srgbClr val="333333"/>
                 </a:solidFill>
@@ -4772,7 +4772,7 @@
               </a:spcAft>
             </a:pPr>
             <a:r>
-              <a:rPr sz="1600" b="0" i="0">
+              <a:rPr sz="2000" b="0" i="0">
                 <a:solidFill>
                   <a:srgbClr val="333333"/>
                 </a:solidFill>
@@ -4781,7 +4781,7 @@
               <a:t>–   </a:t>
             </a:r>
             <a:r>
-              <a:rPr sz="1600" b="1" i="0">
+              <a:rPr sz="2000" b="1" i="0">
                 <a:solidFill>
                   <a:srgbClr val="333333"/>
                 </a:solidFill>
@@ -4790,7 +4790,7 @@
               <a:t>Trabajo independiente:</a:t>
             </a:r>
             <a:r>
-              <a:rPr sz="1600" b="0" i="0">
+              <a:rPr sz="2000" b="0" i="0">
                 <a:solidFill>
                   <a:srgbClr val="333333"/>
                 </a:solidFill>
@@ -4799,7 +4799,7 @@
               <a:t> Corrección del prototipo: dejar el </a:t>
             </a:r>
             <a:r>
-              <a:rPr sz="1600" b="1" i="0">
+              <a:rPr sz="2000" b="1" i="0">
                 <a:solidFill>
                   <a:srgbClr val="333333"/>
                 </a:solidFill>
@@ -4808,7 +4808,7 @@
               <a:t>v2 navegable</a:t>
             </a:r>
             <a:r>
-              <a:rPr sz="1600" b="0" i="0">
+              <a:rPr sz="2000" b="0" i="0">
                 <a:solidFill>
                   <a:srgbClr val="333333"/>
                 </a:solidFill>
@@ -4817,7 +4817,7 @@
               <a:t> en la carpeta del equipo, con todas las correcciones aplicadas, y </a:t>
             </a:r>
             <a:r>
-              <a:rPr sz="1600" b="1" i="0">
+              <a:rPr sz="2000" b="1" i="0">
                 <a:solidFill>
                   <a:srgbClr val="333333"/>
                 </a:solidFill>
@@ -4826,7 +4826,7 @@
               <a:t>conseguir a la persona ajena</a:t>
             </a:r>
             <a:r>
-              <a:rPr sz="1600" b="0" i="0">
+              <a:rPr sz="2000" b="0" i="0">
                 <a:solidFill>
                   <a:srgbClr val="333333"/>
                 </a:solidFill>
@@ -4842,7 +4842,7 @@
               </a:spcAft>
             </a:pPr>
             <a:r>
-              <a:rPr sz="1600" b="0" i="0">
+              <a:rPr sz="2000" b="0" i="0">
                 <a:solidFill>
                   <a:srgbClr val="333333"/>
                 </a:solidFill>
@@ -4851,7 +4851,7 @@
               <a:t>–   </a:t>
             </a:r>
             <a:r>
-              <a:rPr sz="1600" b="1" i="0">
+              <a:rPr sz="2000" b="1" i="0">
                 <a:solidFill>
                   <a:srgbClr val="333333"/>
                 </a:solidFill>
@@ -4860,7 +4860,7 @@
               <a:t>Sesión 12 · Presentación de avances de proyectos</a:t>
             </a:r>
             <a:r>
-              <a:rPr sz="1600" b="0" i="0">
+              <a:rPr sz="2000" b="0" i="0">
                 <a:solidFill>
                   <a:srgbClr val="333333"/>
                 </a:solidFill>
@@ -4869,7 +4869,7 @@
               <a:t> — arranca el </a:t>
             </a:r>
             <a:r>
-              <a:rPr sz="1600" b="1" i="0">
+              <a:rPr sz="2000" b="1" i="0">
                 <a:solidFill>
                   <a:srgbClr val="333333"/>
                 </a:solidFill>
@@ -4878,7 +4878,7 @@
               <a:t>corte 3</a:t>
             </a:r>
             <a:r>
-              <a:rPr sz="1600" b="0" i="0">
+              <a:rPr sz="2000" b="0" i="0">
                 <a:solidFill>
                   <a:srgbClr val="333333"/>
                 </a:solidFill>
@@ -4887,7 +4887,7 @@
               <a:t> con la </a:t>
             </a:r>
             <a:r>
-              <a:rPr sz="1600" b="1" i="0">
+              <a:rPr sz="2000" b="1" i="0">
                 <a:solidFill>
                   <a:srgbClr val="333333"/>
                 </a:solidFill>
@@ -4896,7 +4896,7 @@
               <a:t>presentación de avances</a:t>
             </a:r>
             <a:r>
-              <a:rPr sz="1600" b="0" i="0">
+              <a:rPr sz="2000" b="0" i="0">
                 <a:solidFill>
                   <a:srgbClr val="333333"/>
                 </a:solidFill>
@@ -4912,7 +4912,7 @@
               </a:spcAft>
             </a:pPr>
             <a:r>
-              <a:rPr sz="1600" b="0" i="0">
+              <a:rPr sz="2000" b="0" i="0">
                 <a:solidFill>
                   <a:srgbClr val="333333"/>
                 </a:solidFill>
@@ -4921,7 +4921,7 @@
               <a:t>–   </a:t>
             </a:r>
             <a:r>
-              <a:rPr sz="1600" b="1" i="0">
+              <a:rPr sz="2000" b="1" i="0">
                 <a:solidFill>
                   <a:srgbClr val="333333"/>
                 </a:solidFill>
@@ -4930,7 +4930,7 @@
               <a:t>Aviso:</a:t>
             </a:r>
             <a:r>
-              <a:rPr sz="1600" b="0" i="0">
+              <a:rPr sz="2000" b="0" i="0">
                 <a:solidFill>
                   <a:srgbClr val="333333"/>
                 </a:solidFill>
@@ -4939,7 +4939,7 @@
               <a:t> Para la sesión 12 traigan el prototipo v2 navegable </a:t>
             </a:r>
             <a:r>
-              <a:rPr sz="1600" b="1" i="0">
+              <a:rPr sz="2000" b="1" i="0">
                 <a:solidFill>
                   <a:srgbClr val="333333"/>
                 </a:solidFill>
@@ -4948,7 +4948,7 @@
               <a:t>y la prueba ya hecha con una persona ajena al equipo</a:t>
             </a:r>
             <a:r>
-              <a:rPr sz="1600" b="0" i="0">
+              <a:rPr sz="2000" b="0" i="0">
                 <a:solidFill>
                   <a:srgbClr val="333333"/>
                 </a:solidFill>
@@ -4964,7 +4964,7 @@
               </a:spcAft>
             </a:pPr>
             <a:r>
-              <a:rPr sz="1600" b="0" i="0">
+              <a:rPr sz="2000" b="0" i="0">
                 <a:solidFill>
                   <a:srgbClr val="333333"/>
                 </a:solidFill>
@@ -4973,7 +4973,7 @@
               <a:t>–   </a:t>
             </a:r>
             <a:r>
-              <a:rPr sz="1600" b="1" i="0">
+              <a:rPr sz="2000" b="1" i="0">
                 <a:solidFill>
                   <a:srgbClr val="333333"/>
                 </a:solidFill>
@@ -4982,7 +4982,7 @@
               <a:t>Antes de salir:</a:t>
             </a:r>
             <a:r>
-              <a:rPr sz="1600" b="0" i="0">
+              <a:rPr sz="2000" b="0" i="0">
                 <a:solidFill>
                   <a:srgbClr val="333333"/>
                 </a:solidFill>
@@ -5556,7 +5556,7 @@
         <p:spPr>
           <a:xfrm>
             <a:off x="502920" y="2798064"/>
-            <a:ext cx="1788109" cy="2560320"/>
+            <a:ext cx="1788109" cy="3099816"/>
           </a:xfrm>
           <a:prstGeom prst="rect">
             <a:avLst/>
@@ -5671,7 +5671,7 @@
         <p:spPr>
           <a:xfrm>
             <a:off x="2382469" y="2798064"/>
-            <a:ext cx="1788109" cy="2560320"/>
+            <a:ext cx="1788109" cy="3099816"/>
           </a:xfrm>
           <a:prstGeom prst="rect">
             <a:avLst/>
@@ -5786,7 +5786,7 @@
         <p:spPr>
           <a:xfrm>
             <a:off x="4262018" y="2798064"/>
-            <a:ext cx="1788109" cy="2560320"/>
+            <a:ext cx="1788109" cy="3099816"/>
           </a:xfrm>
           <a:prstGeom prst="rect">
             <a:avLst/>
@@ -5901,7 +5901,7 @@
         <p:spPr>
           <a:xfrm>
             <a:off x="6141567" y="2798064"/>
-            <a:ext cx="1788109" cy="2560320"/>
+            <a:ext cx="1788109" cy="3099816"/>
           </a:xfrm>
           <a:prstGeom prst="rect">
             <a:avLst/>
@@ -6016,7 +6016,7 @@
         <p:spPr>
           <a:xfrm>
             <a:off x="8021116" y="2798064"/>
-            <a:ext cx="1788109" cy="2560320"/>
+            <a:ext cx="1788109" cy="3099816"/>
           </a:xfrm>
           <a:prstGeom prst="rect">
             <a:avLst/>
@@ -6131,7 +6131,7 @@
         <p:spPr>
           <a:xfrm>
             <a:off x="9900666" y="2798064"/>
-            <a:ext cx="1788109" cy="2560320"/>
+            <a:ext cx="1788109" cy="3099816"/>
           </a:xfrm>
           <a:prstGeom prst="rect">
             <a:avLst/>
@@ -6165,8 +6165,8 @@
         </p:nvSpPr>
         <p:spPr>
           <a:xfrm>
-            <a:off x="457200" y="5943600"/>
-            <a:ext cx="11277295" cy="365760"/>
+            <a:off x="457200" y="5806440"/>
+            <a:ext cx="11277295" cy="640080"/>
           </a:xfrm>
           <a:prstGeom prst="rect">
             <a:avLst/>
@@ -6181,7 +6181,7 @@
           <a:p>
             <a:pPr algn="ctr"/>
             <a:r>
-              <a:rPr sz="1200" b="1" i="1">
+              <a:rPr sz="1100" b="1" i="1">
                 <a:solidFill>
                   <a:srgbClr val="666666"/>
                 </a:solidFill>
@@ -6190,7 +6190,7 @@
               <a:t>Esta sesión cierra el corte 2 (30 %).</a:t>
             </a:r>
             <a:r>
-              <a:rPr sz="1200" b="0" i="1">
+              <a:rPr sz="1100" b="0" i="1">
                 <a:solidFill>
                   <a:srgbClr val="666666"/>
                 </a:solidFill>
@@ -6199,7 +6199,7 @@
               <a:t> La teoría baja a 17 minutos y la actividad a 27 para que quepan los </a:t>
             </a:r>
             <a:r>
-              <a:rPr sz="1200" b="1" i="1">
+              <a:rPr sz="1100" b="1" i="1">
                 <a:solidFill>
                   <a:srgbClr val="666666"/>
                 </a:solidFill>
@@ -6208,7 +6208,7 @@
               <a:t>20 minutos de evaluación</a:t>
             </a:r>
             <a:r>
-              <a:rPr sz="1200" b="0" i="1">
+              <a:rPr sz="1100" b="0" i="1">
                 <a:solidFill>
                   <a:srgbClr val="666666"/>
                 </a:solidFill>
@@ -6217,7 +6217,7 @@
               <a:t> al final, en ExamLab, sobre las sesiones 7 a 11. Es además la </a:t>
             </a:r>
             <a:r>
-              <a:rPr sz="1200" b="1" i="1">
+              <a:rPr sz="1100" b="1" i="1">
                 <a:solidFill>
                   <a:srgbClr val="666666"/>
                 </a:solidFill>
@@ -6226,7 +6226,7 @@
               <a:t>segunda y última sesión con asistente de IA autorizado</a:t>
             </a:r>
             <a:r>
-              <a:rPr sz="1200" b="0" i="1">
+              <a:rPr sz="1100" b="0" i="1">
                 <a:solidFill>
                   <a:srgbClr val="666666"/>
                 </a:solidFill>
@@ -6446,7 +6446,7 @@
               </a:spcAft>
             </a:pPr>
             <a:r>
-              <a:rPr sz="1600" b="0" i="0">
+              <a:rPr sz="2000" b="0" i="0">
                 <a:solidFill>
                   <a:srgbClr val="333333"/>
                 </a:solidFill>
@@ -6455,7 +6455,7 @@
               <a:t>–   Escribir un </a:t>
             </a:r>
             <a:r>
-              <a:rPr sz="1600" b="1" i="0">
+              <a:rPr sz="2000" b="1" i="0">
                 <a:solidFill>
                   <a:srgbClr val="333333"/>
                 </a:solidFill>
@@ -6464,7 +6464,7 @@
               <a:t>prompt con contexto</a:t>
             </a:r>
             <a:r>
-              <a:rPr sz="1600" b="0" i="0">
+              <a:rPr sz="2000" b="0" i="0">
                 <a:solidFill>
                   <a:srgbClr val="333333"/>
                 </a:solidFill>
@@ -6473,7 +6473,7 @@
               <a:t>: problema, actores y </a:t>
             </a:r>
             <a:r>
-              <a:rPr sz="1600" b="1" i="0">
+              <a:rPr sz="2000" b="1" i="0">
                 <a:solidFill>
                   <a:srgbClr val="333333"/>
                 </a:solidFill>
@@ -6482,7 +6482,7 @@
               <a:t>restricciones</a:t>
             </a:r>
             <a:r>
-              <a:rPr sz="1600" b="0" i="0">
+              <a:rPr sz="2000" b="0" i="0">
                 <a:solidFill>
                   <a:srgbClr val="333333"/>
                 </a:solidFill>
@@ -6498,7 +6498,7 @@
               </a:spcAft>
             </a:pPr>
             <a:r>
-              <a:rPr sz="1600" b="0" i="0">
+              <a:rPr sz="2000" b="0" i="0">
                 <a:solidFill>
                   <a:srgbClr val="333333"/>
                 </a:solidFill>
@@ -6507,7 +6507,7 @@
               <a:t>–   Pedir </a:t>
             </a:r>
             <a:r>
-              <a:rPr sz="1600" b="1" i="0">
+              <a:rPr sz="2000" b="1" i="0">
                 <a:solidFill>
                   <a:srgbClr val="333333"/>
                 </a:solidFill>
@@ -6516,7 +6516,7 @@
               <a:t>variantes</a:t>
             </a:r>
             <a:r>
-              <a:rPr sz="1600" b="0" i="0">
+              <a:rPr sz="2000" b="0" i="0">
                 <a:solidFill>
                   <a:srgbClr val="333333"/>
                 </a:solidFill>
@@ -6532,7 +6532,7 @@
               </a:spcAft>
             </a:pPr>
             <a:r>
-              <a:rPr sz="1600" b="0" i="0">
+              <a:rPr sz="2000" b="0" i="0">
                 <a:solidFill>
                   <a:srgbClr val="333333"/>
                 </a:solidFill>
@@ -6541,7 +6541,7 @@
               <a:t>–   Detectar y </a:t>
             </a:r>
             <a:r>
-              <a:rPr sz="1600" b="1" i="0">
+              <a:rPr sz="2000" b="1" i="0">
                 <a:solidFill>
                   <a:srgbClr val="333333"/>
                 </a:solidFill>
@@ -6550,7 +6550,7 @@
               <a:t>corregir lo que la IA no podía saber</a:t>
             </a:r>
             <a:r>
-              <a:rPr sz="1600" b="0" i="0">
+              <a:rPr sz="2000" b="0" i="0">
                 <a:solidFill>
                   <a:srgbClr val="333333"/>
                 </a:solidFill>
@@ -6566,7 +6566,7 @@
               </a:spcAft>
             </a:pPr>
             <a:r>
-              <a:rPr sz="1600" b="0" i="0">
+              <a:rPr sz="2000" b="0" i="0">
                 <a:solidFill>
                   <a:srgbClr val="333333"/>
                 </a:solidFill>
@@ -6575,7 +6575,7 @@
               <a:t>–   Dejar </a:t>
             </a:r>
             <a:r>
-              <a:rPr sz="1600" b="1" i="0">
+              <a:rPr sz="2000" b="1" i="0">
                 <a:solidFill>
                   <a:srgbClr val="333333"/>
                 </a:solidFill>
@@ -6584,7 +6584,7 @@
               <a:t>trazabilidad del uso de IA</a:t>
             </a:r>
             <a:r>
-              <a:rPr sz="1600" b="0" i="0">
+              <a:rPr sz="2000" b="0" i="0">
                 <a:solidFill>
                   <a:srgbClr val="333333"/>
                 </a:solidFill>
@@ -9236,7 +9236,7 @@
               </a:spcAft>
             </a:pPr>
             <a:r>
-              <a:rPr sz="1300" b="0" i="0">
+              <a:rPr sz="1500" b="0" i="0">
                 <a:solidFill>
                   <a:srgbClr val="333333"/>
                 </a:solidFill>
@@ -9245,7 +9245,7 @@
               <a:t>–   Pantalla de </a:t>
             </a:r>
             <a:r>
-              <a:rPr sz="1300" b="1" i="0">
+              <a:rPr sz="1500" b="1" i="0">
                 <a:solidFill>
                   <a:srgbClr val="333333"/>
                 </a:solidFill>
@@ -9254,7 +9254,7 @@
               <a:t>registro con correo y contraseña</a:t>
             </a:r>
             <a:r>
-              <a:rPr sz="1300" b="0" i="0">
+              <a:rPr sz="1500" b="0" i="0">
                 <a:solidFill>
                   <a:srgbClr val="333333"/>
                 </a:solidFill>
@@ -9270,7 +9270,7 @@
               </a:spcAft>
             </a:pPr>
             <a:r>
-              <a:rPr sz="1300" b="0" i="0">
+              <a:rPr sz="1500" b="0" i="0">
                 <a:solidFill>
                   <a:srgbClr val="333333"/>
                 </a:solidFill>
@@ -9279,7 +9279,7 @@
               <a:t>–   </a:t>
             </a:r>
             <a:r>
-              <a:rPr sz="1300" b="1" i="0">
+              <a:rPr sz="1500" b="1" i="0">
                 <a:solidFill>
                   <a:srgbClr val="333333"/>
                 </a:solidFill>
@@ -9288,7 +9288,7 @@
               <a:t>Aviso automático por correo</a:t>
             </a:r>
             <a:r>
-              <a:rPr sz="1300" b="0" i="0">
+              <a:rPr sz="1500" b="0" i="0">
                 <a:solidFill>
                   <a:srgbClr val="333333"/>
                 </a:solidFill>
@@ -9304,7 +9304,7 @@
               </a:spcAft>
             </a:pPr>
             <a:r>
-              <a:rPr sz="1300" b="0" i="0">
+              <a:rPr sz="1500" b="0" i="0">
                 <a:solidFill>
                   <a:srgbClr val="333333"/>
                 </a:solidFill>
@@ -9313,7 +9313,7 @@
               <a:t>–   Sistema de </a:t>
             </a:r>
             <a:r>
-              <a:rPr sz="1300" b="1" i="0">
+              <a:rPr sz="1500" b="1" i="0">
                 <a:solidFill>
                   <a:srgbClr val="333333"/>
                 </a:solidFill>
@@ -9322,7 +9322,7 @@
               <a:t>reservas</a:t>
             </a:r>
             <a:r>
-              <a:rPr sz="1300" b="0" i="0">
+              <a:rPr sz="1500" b="0" i="0">
                 <a:solidFill>
                   <a:srgbClr val="333333"/>
                 </a:solidFill>
@@ -9338,7 +9338,7 @@
               </a:spcAft>
             </a:pPr>
             <a:r>
-              <a:rPr sz="1300" b="0" i="0">
+              <a:rPr sz="1500" b="0" i="0">
                 <a:solidFill>
                   <a:srgbClr val="333333"/>
                 </a:solidFill>
@@ -9347,7 +9347,7 @@
               <a:t>–   Catálogo con </a:t>
             </a:r>
             <a:r>
-              <a:rPr sz="1300" b="1" i="0">
+              <a:rPr sz="1500" b="1" i="0">
                 <a:solidFill>
                   <a:srgbClr val="333333"/>
                 </a:solidFill>
@@ -9356,7 +9356,7 @@
               <a:t>imágenes de portadas</a:t>
             </a:r>
             <a:r>
-              <a:rPr sz="1300" b="0" i="0">
+              <a:rPr sz="1500" b="0" i="0">
                 <a:solidFill>
                   <a:srgbClr val="333333"/>
                 </a:solidFill>
@@ -9372,7 +9372,7 @@
               </a:spcAft>
             </a:pPr>
             <a:r>
-              <a:rPr sz="1300" b="0" i="0">
+              <a:rPr sz="1500" b="0" i="0">
                 <a:solidFill>
                   <a:srgbClr val="333333"/>
                 </a:solidFill>
@@ -9532,7 +9532,7 @@
               </a:spcAft>
             </a:pPr>
             <a:r>
-              <a:rPr sz="1300" b="0" i="0">
+              <a:rPr sz="1500" b="0" i="0">
                 <a:solidFill>
                   <a:srgbClr val="333333"/>
                 </a:solidFill>
@@ -9541,7 +9541,7 @@
               <a:t>–   </a:t>
             </a:r>
             <a:r>
-              <a:rPr sz="1300" b="1" i="0">
+              <a:rPr sz="1500" b="1" i="0">
                 <a:solidFill>
                   <a:srgbClr val="333333"/>
                 </a:solidFill>
@@ -9550,7 +9550,7 @@
               <a:t>Sin cuenta</a:t>
             </a:r>
             <a:r>
-              <a:rPr sz="1300" b="0" i="0">
+              <a:rPr sz="1500" b="0" i="0">
                 <a:solidFill>
                   <a:srgbClr val="333333"/>
                 </a:solidFill>
@@ -9566,7 +9566,7 @@
               </a:spcAft>
             </a:pPr>
             <a:r>
-              <a:rPr sz="1300" b="0" i="0">
+              <a:rPr sz="1500" b="0" i="0">
                 <a:solidFill>
                   <a:srgbClr val="333333"/>
                 </a:solidFill>
@@ -9575,7 +9575,7 @@
               <a:t>–   </a:t>
             </a:r>
             <a:r>
-              <a:rPr sz="1300" b="1" i="0">
+              <a:rPr sz="1500" b="1" i="0">
                 <a:solidFill>
                   <a:srgbClr val="333333"/>
                 </a:solidFill>
@@ -9584,7 +9584,7 @@
               <a:t>Nada de correos</a:t>
             </a:r>
             <a:r>
-              <a:rPr sz="1300" b="0" i="0">
+              <a:rPr sz="1500" b="0" i="0">
                 <a:solidFill>
                   <a:srgbClr val="333333"/>
                 </a:solidFill>
@@ -9600,7 +9600,7 @@
               </a:spcAft>
             </a:pPr>
             <a:r>
-              <a:rPr sz="1300" b="0" i="0">
+              <a:rPr sz="1500" b="0" i="0">
                 <a:solidFill>
                   <a:srgbClr val="333333"/>
                 </a:solidFill>
@@ -9609,7 +9609,7 @@
               <a:t>–   </a:t>
             </a:r>
             <a:r>
-              <a:rPr sz="1300" b="1" i="0">
+              <a:rPr sz="1500" b="1" i="0">
                 <a:solidFill>
                   <a:srgbClr val="333333"/>
                 </a:solidFill>
@@ -9618,7 +9618,7 @@
               <a:t>Sin reservas ni historial</a:t>
             </a:r>
             <a:r>
-              <a:rPr sz="1300" b="0" i="0">
+              <a:rPr sz="1500" b="0" i="0">
                 <a:solidFill>
                   <a:srgbClr val="333333"/>
                 </a:solidFill>
@@ -9634,7 +9634,7 @@
               </a:spcAft>
             </a:pPr>
             <a:r>
-              <a:rPr sz="1300" b="0" i="0">
+              <a:rPr sz="1500" b="0" i="0">
                 <a:solidFill>
                   <a:srgbClr val="333333"/>
                 </a:solidFill>
@@ -9643,7 +9643,7 @@
               <a:t>–   </a:t>
             </a:r>
             <a:r>
-              <a:rPr sz="1300" b="1" i="0">
+              <a:rPr sz="1500" b="1" i="0">
                 <a:solidFill>
                   <a:srgbClr val="333333"/>
                 </a:solidFill>
@@ -9652,7 +9652,7 @@
               <a:t>Sin imágenes</a:t>
             </a:r>
             <a:r>
-              <a:rPr sz="1300" b="0" i="0">
+              <a:rPr sz="1500" b="0" i="0">
                 <a:solidFill>
                   <a:srgbClr val="333333"/>
                 </a:solidFill>
@@ -9668,7 +9668,7 @@
               </a:spcAft>
             </a:pPr>
             <a:r>
-              <a:rPr sz="1300" b="0" i="0">
+              <a:rPr sz="1500" b="0" i="0">
                 <a:solidFill>
                   <a:srgbClr val="333333"/>
                 </a:solidFill>

--- a/Introduccion a la Ingenieria/Clases/Clase 11 - Taller de prototipado inicial con IA/Presentacion.pptx
+++ b/Introduccion a la Ingenieria/Clases/Clase 11 - Taller de prototipado inicial con IA/Presentacion.pptx
@@ -6037,7 +6037,7 @@
                 </a:solidFill>
                 <a:latin typeface="Calibri"/>
               </a:rPr>
-              <a:t>Evaluación de corte 2 — En ExamLab · cubre las sesiones 7 a 11</a:t>
+              <a:t>Evaluación de corte 2 — En la plataforma del curso · cubre las sesiones 7 a 11</a:t>
             </a:r>
           </a:p>
         </p:txBody>
@@ -6214,7 +6214,7 @@
                 </a:solidFill>
                 <a:latin typeface="Calibri"/>
               </a:rPr>
-              <a:t> al final, en ExamLab, sobre las sesiones 7 a 11. Es además la </a:t>
+              <a:t> al final, en la plataforma del curso, sobre las sesiones 7 a 11. Es además la </a:t>
             </a:r>
             <a:r>
               <a:rPr sz="1100" b="1" i="1">
@@ -10158,7 +10158,7 @@
                 </a:solidFill>
                 <a:latin typeface="Calibri"/>
               </a:rPr>
-              <a:t>La evaluación se aplica en ExamLab</a:t>
+              <a:t>La evaluación se aplica en la plataforma del curso</a:t>
             </a:r>
             <a:r>
               <a:rPr sz="1400" b="0" i="0">

--- a/Introduccion a la Ingenieria/Clases/Clase 11 - Taller de prototipado inicial con IA/Presentacion.pptx
+++ b/Introduccion a la Ingenieria/Clases/Clase 11 - Taller de prototipado inicial con IA/Presentacion.pptx
@@ -4705,7 +4705,7 @@
                 </a:solidFill>
                 <a:latin typeface="Calibri"/>
               </a:rPr>
-              <a:t>Para la sesión 12</a:t>
+              <a:t>Para la Clase 12</a:t>
             </a:r>
           </a:p>
         </p:txBody>
@@ -4857,7 +4857,7 @@
                 </a:solidFill>
                 <a:latin typeface="Calibri"/>
               </a:rPr>
-              <a:t>Sesión 12 · Presentación de avances de proyectos</a:t>
+              <a:t>Clase 12 · Presentación de avances de proyectos</a:t>
             </a:r>
             <a:r>
               <a:rPr sz="2000" b="0" i="0">
@@ -4936,7 +4936,7 @@
                 </a:solidFill>
                 <a:latin typeface="Calibri"/>
               </a:rPr>
-              <a:t> Para la sesión 12 traigan el prototipo v2 navegable </a:t>
+              <a:t> Para la Clase 12 traigan el prototipo v2 navegable </a:t>
             </a:r>
             <a:r>
               <a:rPr sz="2000" b="1" i="0">
@@ -4954,7 +4954,7 @@
                 </a:solidFill>
                 <a:latin typeface="Calibri"/>
               </a:rPr>
-              <a:t>, con la lista de lo que falló. Sin esa lista no hay nada que presentar: la sesión 12 es sobre lo que salió mal, no sobre lo que se planeó.</a:t>
+              <a:t>, con la lista de lo que falló. Sin esa lista no hay nada que presentar: la Clase 12 es sobre lo que salió mal, no sobre lo que se planeó.</a:t>
             </a:r>
           </a:p>
           <a:p>
@@ -5149,7 +5149,7 @@
                 </a:solidFill>
                 <a:latin typeface="Calibri"/>
               </a:rPr>
-              <a:t>Cierra el corte 2 · Nos vemos en la sesión 12</a:t>
+              <a:t>Cierra el corte 2 · Nos vemos en la Clase 12</a:t>
             </a:r>
           </a:p>
         </p:txBody>
